--- a/03-课件PPT/讲次版/第4章-2-讲次 4-2 · Working Memory 与任务上.pptx
+++ b/03-课件PPT/讲次版/第4章-2-讲次 4-2 · Working Memory 与任务上.pptx
@@ -4873,21 +4873,391 @@
                 </a:solidFill>
                 <a:latin typeface="PingFang SC"/>
               </a:rPr>
-              <a:t>task_summary 恢复锚点实测,$ memory.set_short("done", "已定位根因");$ memory.task_summary();任务状态摘要;done: 已定位根因;# 上下文截断后注入新窗口→续跑</a:t>
-            </a:r>
-          </a:p>
-        </p:txBody>
-      </p:sp>
-      <p:sp>
-        <p:nvSpPr>
-          <p:cNvPr id="5" name="TextBox 4"/>
+              <a:t>task_summary 恢复锚点实测</a:t>
+            </a:r>
+          </a:p>
+        </p:txBody>
+      </p:sp>
+      <p:sp>
+        <p:nvSpPr>
+          <p:cNvPr id="5" name="Rounded Rectangle 4"/>
+          <p:cNvSpPr/>
+          <p:nvPr/>
+        </p:nvSpPr>
+        <p:spPr>
+          <a:xfrm>
+            <a:off x="1333500" y="1047750"/>
+            <a:ext cx="9525000" cy="2667000"/>
+          </a:xfrm>
+          <a:prstGeom prst="roundRect">
+            <a:avLst>
+              <a:gd name="adj" fmla="val 8000"/>
+            </a:avLst>
+          </a:prstGeom>
+          <a:solidFill>
+            <a:srgbClr val="0D1117"/>
+          </a:solidFill>
+          <a:ln>
+            <a:noFill/>
+          </a:ln>
+          <a:effectLst/>
+        </p:spPr>
+        <p:style>
+          <a:lnRef idx="1">
+            <a:schemeClr val="accent1"/>
+          </a:lnRef>
+          <a:fillRef idx="3">
+            <a:schemeClr val="accent1"/>
+          </a:fillRef>
+          <a:effectRef idx="2">
+            <a:schemeClr val="accent1"/>
+          </a:effectRef>
+          <a:fontRef idx="minor">
+            <a:schemeClr val="lt1"/>
+          </a:fontRef>
+        </p:style>
+        <p:txBody>
+          <a:bodyPr rtlCol="0" anchor="ctr"/>
+          <a:lstStyle/>
+          <a:p>
+            <a:pPr algn="ctr"/>
+          </a:p>
+        </p:txBody>
+      </p:sp>
+      <p:sp>
+        <p:nvSpPr>
+          <p:cNvPr id="6" name="Rectangle 5"/>
+          <p:cNvSpPr/>
+          <p:nvPr/>
+        </p:nvSpPr>
+        <p:spPr>
+          <a:xfrm>
+            <a:off x="1333500" y="1047750"/>
+            <a:ext cx="9525000" cy="381000"/>
+          </a:xfrm>
+          <a:prstGeom prst="rect">
+            <a:avLst/>
+          </a:prstGeom>
+          <a:solidFill>
+            <a:srgbClr val="1F2937"/>
+          </a:solidFill>
+          <a:ln>
+            <a:noFill/>
+          </a:ln>
+          <a:effectLst/>
+        </p:spPr>
+        <p:style>
+          <a:lnRef idx="1">
+            <a:schemeClr val="accent1"/>
+          </a:lnRef>
+          <a:fillRef idx="3">
+            <a:schemeClr val="accent1"/>
+          </a:fillRef>
+          <a:effectRef idx="2">
+            <a:schemeClr val="accent1"/>
+          </a:effectRef>
+          <a:fontRef idx="minor">
+            <a:schemeClr val="lt1"/>
+          </a:fontRef>
+        </p:style>
+        <p:txBody>
+          <a:bodyPr rtlCol="0" anchor="ctr"/>
+          <a:lstStyle/>
+          <a:p>
+            <a:pPr algn="ctr"/>
+          </a:p>
+        </p:txBody>
+      </p:sp>
+      <p:sp>
+        <p:nvSpPr>
+          <p:cNvPr id="7" name="Rounded Rectangle 6"/>
+          <p:cNvSpPr/>
+          <p:nvPr/>
+        </p:nvSpPr>
+        <p:spPr>
+          <a:xfrm>
+            <a:off x="1504950" y="1181100"/>
+            <a:ext cx="123825" cy="123825"/>
+          </a:xfrm>
+          <a:prstGeom prst="roundRect">
+            <a:avLst>
+              <a:gd name="adj" fmla="val 8000"/>
+            </a:avLst>
+          </a:prstGeom>
+          <a:solidFill>
+            <a:srgbClr val="F87171"/>
+          </a:solidFill>
+          <a:ln>
+            <a:noFill/>
+          </a:ln>
+          <a:effectLst/>
+        </p:spPr>
+        <p:style>
+          <a:lnRef idx="1">
+            <a:schemeClr val="accent1"/>
+          </a:lnRef>
+          <a:fillRef idx="3">
+            <a:schemeClr val="accent1"/>
+          </a:fillRef>
+          <a:effectRef idx="2">
+            <a:schemeClr val="accent1"/>
+          </a:effectRef>
+          <a:fontRef idx="minor">
+            <a:schemeClr val="lt1"/>
+          </a:fontRef>
+        </p:style>
+        <p:txBody>
+          <a:bodyPr rtlCol="0" anchor="ctr"/>
+          <a:lstStyle/>
+          <a:p>
+            <a:pPr algn="ctr"/>
+          </a:p>
+        </p:txBody>
+      </p:sp>
+      <p:sp>
+        <p:nvSpPr>
+          <p:cNvPr id="8" name="Rounded Rectangle 7"/>
+          <p:cNvSpPr/>
+          <p:nvPr/>
+        </p:nvSpPr>
+        <p:spPr>
+          <a:xfrm>
+            <a:off x="1752600" y="1181100"/>
+            <a:ext cx="123825" cy="123825"/>
+          </a:xfrm>
+          <a:prstGeom prst="roundRect">
+            <a:avLst>
+              <a:gd name="adj" fmla="val 8000"/>
+            </a:avLst>
+          </a:prstGeom>
+          <a:solidFill>
+            <a:srgbClr val="F59E0B"/>
+          </a:solidFill>
+          <a:ln>
+            <a:noFill/>
+          </a:ln>
+          <a:effectLst/>
+        </p:spPr>
+        <p:style>
+          <a:lnRef idx="1">
+            <a:schemeClr val="accent1"/>
+          </a:lnRef>
+          <a:fillRef idx="3">
+            <a:schemeClr val="accent1"/>
+          </a:fillRef>
+          <a:effectRef idx="2">
+            <a:schemeClr val="accent1"/>
+          </a:effectRef>
+          <a:fontRef idx="minor">
+            <a:schemeClr val="lt1"/>
+          </a:fontRef>
+        </p:style>
+        <p:txBody>
+          <a:bodyPr rtlCol="0" anchor="ctr"/>
+          <a:lstStyle/>
+          <a:p>
+            <a:pPr algn="ctr"/>
+          </a:p>
+        </p:txBody>
+      </p:sp>
+      <p:sp>
+        <p:nvSpPr>
+          <p:cNvPr id="9" name="Rounded Rectangle 8"/>
+          <p:cNvSpPr/>
+          <p:nvPr/>
+        </p:nvSpPr>
+        <p:spPr>
+          <a:xfrm>
+            <a:off x="2000250" y="1181100"/>
+            <a:ext cx="123825" cy="123825"/>
+          </a:xfrm>
+          <a:prstGeom prst="roundRect">
+            <a:avLst>
+              <a:gd name="adj" fmla="val 8000"/>
+            </a:avLst>
+          </a:prstGeom>
+          <a:solidFill>
+            <a:srgbClr val="34D399"/>
+          </a:solidFill>
+          <a:ln>
+            <a:noFill/>
+          </a:ln>
+          <a:effectLst/>
+        </p:spPr>
+        <p:style>
+          <a:lnRef idx="1">
+            <a:schemeClr val="accent1"/>
+          </a:lnRef>
+          <a:fillRef idx="3">
+            <a:schemeClr val="accent1"/>
+          </a:fillRef>
+          <a:effectRef idx="2">
+            <a:schemeClr val="accent1"/>
+          </a:effectRef>
+          <a:fontRef idx="minor">
+            <a:schemeClr val="lt1"/>
+          </a:fontRef>
+        </p:style>
+        <p:txBody>
+          <a:bodyPr rtlCol="0" anchor="ctr"/>
+          <a:lstStyle/>
+          <a:p>
+            <a:pPr algn="ctr"/>
+          </a:p>
+        </p:txBody>
+      </p:sp>
+      <p:sp>
+        <p:nvSpPr>
+          <p:cNvPr id="10" name="TextBox 9"/>
           <p:cNvSpPr txBox="1"/>
           <p:nvPr/>
         </p:nvSpPr>
         <p:spPr>
           <a:xfrm>
-            <a:off x="9334500" y="0"/>
-            <a:ext cx="2667000" cy="704850"/>
+            <a:off x="2381250" y="1047750"/>
+            <a:ext cx="8286750" cy="381000"/>
+          </a:xfrm>
+          <a:prstGeom prst="rect">
+            <a:avLst/>
+          </a:prstGeom>
+          <a:noFill/>
+        </p:spPr>
+        <p:txBody>
+          <a:bodyPr wrap="square" anchor="ctr">
+            <a:spAutoFit/>
+          </a:bodyPr>
+          <a:lstStyle/>
+          <a:p>
+            <a:pPr algn="l">
+              <a:lnSpc>
+                <a:spcPct val="100000"/>
+              </a:lnSpc>
+            </a:pPr>
+            <a:r>
+              <a:rPr sz="1100" b="0">
+                <a:solidFill>
+                  <a:srgbClr val="94A3B8"/>
+                </a:solidFill>
+                <a:latin typeface="PingFang SC"/>
+              </a:rPr>
+              <a:t>terminal — 平台实测</a:t>
+            </a:r>
+          </a:p>
+        </p:txBody>
+      </p:sp>
+      <p:sp>
+        <p:nvSpPr>
+          <p:cNvPr id="11" name="TextBox 10"/>
+          <p:cNvSpPr txBox="1"/>
+          <p:nvPr/>
+        </p:nvSpPr>
+        <p:spPr>
+          <a:xfrm>
+            <a:off x="1562100" y="1581150"/>
+            <a:ext cx="9067800" cy="2000250"/>
+          </a:xfrm>
+          <a:prstGeom prst="rect">
+            <a:avLst/>
+          </a:prstGeom>
+          <a:noFill/>
+        </p:spPr>
+        <p:txBody>
+          <a:bodyPr wrap="square">
+            <a:spAutoFit/>
+          </a:bodyPr>
+          <a:lstStyle/>
+          <a:p>
+            <a:pPr>
+              <a:lnSpc>
+                <a:spcPct val="115000"/>
+              </a:lnSpc>
+            </a:pPr>
+            <a:r>
+              <a:rPr sz="1300" b="1">
+                <a:solidFill>
+                  <a:srgbClr val="34D399"/>
+                </a:solidFill>
+                <a:latin typeface="Menlo"/>
+              </a:rPr>
+              <a:t>$ memory.set_short("done", "已定位根因")</a:t>
+            </a:r>
+          </a:p>
+          <a:p>
+            <a:pPr>
+              <a:lnSpc>
+                <a:spcPct val="115000"/>
+              </a:lnSpc>
+            </a:pPr>
+            <a:r>
+              <a:rPr sz="1300" b="1">
+                <a:solidFill>
+                  <a:srgbClr val="34D399"/>
+                </a:solidFill>
+                <a:latin typeface="Menlo"/>
+              </a:rPr>
+              <a:t>$ memory.task_summary()</a:t>
+            </a:r>
+          </a:p>
+          <a:p>
+            <a:pPr>
+              <a:lnSpc>
+                <a:spcPct val="115000"/>
+              </a:lnSpc>
+            </a:pPr>
+            <a:r>
+              <a:rPr sz="1300">
+                <a:solidFill>
+                  <a:srgbClr val="CBD5E1"/>
+                </a:solidFill>
+                <a:latin typeface="Menlo"/>
+              </a:rPr>
+              <a:t>任务状态摘要</a:t>
+            </a:r>
+          </a:p>
+          <a:p>
+            <a:pPr>
+              <a:lnSpc>
+                <a:spcPct val="115000"/>
+              </a:lnSpc>
+            </a:pPr>
+            <a:r>
+              <a:rPr sz="1300">
+                <a:solidFill>
+                  <a:srgbClr val="CBD5E1"/>
+                </a:solidFill>
+                <a:latin typeface="Menlo"/>
+              </a:rPr>
+              <a:t>done: 已定位根因</a:t>
+            </a:r>
+          </a:p>
+          <a:p>
+            <a:pPr>
+              <a:lnSpc>
+                <a:spcPct val="115000"/>
+              </a:lnSpc>
+            </a:pPr>
+            <a:r>
+              <a:rPr sz="1300">
+                <a:solidFill>
+                  <a:srgbClr val="94A3B8"/>
+                </a:solidFill>
+                <a:latin typeface="Menlo"/>
+              </a:rPr>
+              <a:t># 上下文截断后注入新窗口→续跑</a:t>
+            </a:r>
+          </a:p>
+        </p:txBody>
+      </p:sp>
+      <p:sp>
+        <p:nvSpPr>
+          <p:cNvPr id="12" name="TextBox 11"/>
+          <p:cNvSpPr txBox="1"/>
+          <p:nvPr/>
+        </p:nvSpPr>
+        <p:spPr>
+          <a:xfrm>
+            <a:off x="10287000" y="6534150"/>
+            <a:ext cx="1619250" cy="266700"/>
           </a:xfrm>
           <a:prstGeom prst="rect">
             <a:avLst/>
@@ -4906,351 +5276,6 @@
               </a:lnSpc>
             </a:pPr>
             <a:r>
-              <a:rPr sz="1100" b="0">
-                <a:solidFill>
-                  <a:srgbClr val="94A3B8"/>
-                </a:solidFill>
-                <a:latin typeface="PingFang SC"/>
-              </a:rPr>
-              <a:t>tests 真实断言</a:t>
-            </a:r>
-          </a:p>
-        </p:txBody>
-      </p:sp>
-      <p:sp>
-        <p:nvSpPr>
-          <p:cNvPr id="6" name="Rounded Rectangle 5"/>
-          <p:cNvSpPr/>
-          <p:nvPr/>
-        </p:nvSpPr>
-        <p:spPr>
-          <a:xfrm>
-            <a:off x="1333500" y="952500"/>
-            <a:ext cx="9525000" cy="5048250"/>
-          </a:xfrm>
-          <a:prstGeom prst="roundRect">
-            <a:avLst>
-              <a:gd name="adj" fmla="val 8000"/>
-            </a:avLst>
-          </a:prstGeom>
-          <a:solidFill>
-            <a:srgbClr val="0D1117"/>
-          </a:solidFill>
-          <a:ln>
-            <a:noFill/>
-          </a:ln>
-          <a:effectLst/>
-        </p:spPr>
-        <p:style>
-          <a:lnRef idx="1">
-            <a:schemeClr val="accent1"/>
-          </a:lnRef>
-          <a:fillRef idx="3">
-            <a:schemeClr val="accent1"/>
-          </a:fillRef>
-          <a:effectRef idx="2">
-            <a:schemeClr val="accent1"/>
-          </a:effectRef>
-          <a:fontRef idx="minor">
-            <a:schemeClr val="lt1"/>
-          </a:fontRef>
-        </p:style>
-        <p:txBody>
-          <a:bodyPr rtlCol="0" anchor="ctr"/>
-          <a:lstStyle/>
-          <a:p>
-            <a:pPr algn="ctr"/>
-          </a:p>
-        </p:txBody>
-      </p:sp>
-      <p:sp>
-        <p:nvSpPr>
-          <p:cNvPr id="7" name="Rectangle 6"/>
-          <p:cNvSpPr/>
-          <p:nvPr/>
-        </p:nvSpPr>
-        <p:spPr>
-          <a:xfrm>
-            <a:off x="1333500" y="952500"/>
-            <a:ext cx="9525000" cy="381000"/>
-          </a:xfrm>
-          <a:prstGeom prst="rect">
-            <a:avLst/>
-          </a:prstGeom>
-          <a:solidFill>
-            <a:srgbClr val="1F2937"/>
-          </a:solidFill>
-          <a:ln>
-            <a:noFill/>
-          </a:ln>
-          <a:effectLst/>
-        </p:spPr>
-        <p:style>
-          <a:lnRef idx="1">
-            <a:schemeClr val="accent1"/>
-          </a:lnRef>
-          <a:fillRef idx="3">
-            <a:schemeClr val="accent1"/>
-          </a:fillRef>
-          <a:effectRef idx="2">
-            <a:schemeClr val="accent1"/>
-          </a:effectRef>
-          <a:fontRef idx="minor">
-            <a:schemeClr val="lt1"/>
-          </a:fontRef>
-        </p:style>
-        <p:txBody>
-          <a:bodyPr rtlCol="0" anchor="ctr"/>
-          <a:lstStyle/>
-          <a:p>
-            <a:pPr algn="ctr"/>
-          </a:p>
-        </p:txBody>
-      </p:sp>
-      <p:sp>
-        <p:nvSpPr>
-          <p:cNvPr id="8" name="Rounded Rectangle 7"/>
-          <p:cNvSpPr/>
-          <p:nvPr/>
-        </p:nvSpPr>
-        <p:spPr>
-          <a:xfrm>
-            <a:off x="1504950" y="1085850"/>
-            <a:ext cx="123825" cy="123825"/>
-          </a:xfrm>
-          <a:prstGeom prst="roundRect">
-            <a:avLst>
-              <a:gd name="adj" fmla="val 8000"/>
-            </a:avLst>
-          </a:prstGeom>
-          <a:solidFill>
-            <a:srgbClr val="F87171"/>
-          </a:solidFill>
-          <a:ln>
-            <a:noFill/>
-          </a:ln>
-          <a:effectLst/>
-        </p:spPr>
-        <p:style>
-          <a:lnRef idx="1">
-            <a:schemeClr val="accent1"/>
-          </a:lnRef>
-          <a:fillRef idx="3">
-            <a:schemeClr val="accent1"/>
-          </a:fillRef>
-          <a:effectRef idx="2">
-            <a:schemeClr val="accent1"/>
-          </a:effectRef>
-          <a:fontRef idx="minor">
-            <a:schemeClr val="lt1"/>
-          </a:fontRef>
-        </p:style>
-        <p:txBody>
-          <a:bodyPr rtlCol="0" anchor="ctr"/>
-          <a:lstStyle/>
-          <a:p>
-            <a:pPr algn="ctr"/>
-          </a:p>
-        </p:txBody>
-      </p:sp>
-      <p:sp>
-        <p:nvSpPr>
-          <p:cNvPr id="9" name="Rounded Rectangle 8"/>
-          <p:cNvSpPr/>
-          <p:nvPr/>
-        </p:nvSpPr>
-        <p:spPr>
-          <a:xfrm>
-            <a:off x="1752600" y="1085850"/>
-            <a:ext cx="123825" cy="123825"/>
-          </a:xfrm>
-          <a:prstGeom prst="roundRect">
-            <a:avLst>
-              <a:gd name="adj" fmla="val 8000"/>
-            </a:avLst>
-          </a:prstGeom>
-          <a:solidFill>
-            <a:srgbClr val="F59E0B"/>
-          </a:solidFill>
-          <a:ln>
-            <a:noFill/>
-          </a:ln>
-          <a:effectLst/>
-        </p:spPr>
-        <p:style>
-          <a:lnRef idx="1">
-            <a:schemeClr val="accent1"/>
-          </a:lnRef>
-          <a:fillRef idx="3">
-            <a:schemeClr val="accent1"/>
-          </a:fillRef>
-          <a:effectRef idx="2">
-            <a:schemeClr val="accent1"/>
-          </a:effectRef>
-          <a:fontRef idx="minor">
-            <a:schemeClr val="lt1"/>
-          </a:fontRef>
-        </p:style>
-        <p:txBody>
-          <a:bodyPr rtlCol="0" anchor="ctr"/>
-          <a:lstStyle/>
-          <a:p>
-            <a:pPr algn="ctr"/>
-          </a:p>
-        </p:txBody>
-      </p:sp>
-      <p:sp>
-        <p:nvSpPr>
-          <p:cNvPr id="10" name="Rounded Rectangle 9"/>
-          <p:cNvSpPr/>
-          <p:nvPr/>
-        </p:nvSpPr>
-        <p:spPr>
-          <a:xfrm>
-            <a:off x="2000250" y="1085850"/>
-            <a:ext cx="123825" cy="123825"/>
-          </a:xfrm>
-          <a:prstGeom prst="roundRect">
-            <a:avLst>
-              <a:gd name="adj" fmla="val 8000"/>
-            </a:avLst>
-          </a:prstGeom>
-          <a:solidFill>
-            <a:srgbClr val="34D399"/>
-          </a:solidFill>
-          <a:ln>
-            <a:noFill/>
-          </a:ln>
-          <a:effectLst/>
-        </p:spPr>
-        <p:style>
-          <a:lnRef idx="1">
-            <a:schemeClr val="accent1"/>
-          </a:lnRef>
-          <a:fillRef idx="3">
-            <a:schemeClr val="accent1"/>
-          </a:fillRef>
-          <a:effectRef idx="2">
-            <a:schemeClr val="accent1"/>
-          </a:effectRef>
-          <a:fontRef idx="minor">
-            <a:schemeClr val="lt1"/>
-          </a:fontRef>
-        </p:style>
-        <p:txBody>
-          <a:bodyPr rtlCol="0" anchor="ctr"/>
-          <a:lstStyle/>
-          <a:p>
-            <a:pPr algn="ctr"/>
-          </a:p>
-        </p:txBody>
-      </p:sp>
-      <p:sp>
-        <p:nvSpPr>
-          <p:cNvPr id="11" name="TextBox 10"/>
-          <p:cNvSpPr txBox="1"/>
-          <p:nvPr/>
-        </p:nvSpPr>
-        <p:spPr>
-          <a:xfrm>
-            <a:off x="2381250" y="952500"/>
-            <a:ext cx="8286750" cy="381000"/>
-          </a:xfrm>
-          <a:prstGeom prst="rect">
-            <a:avLst/>
-          </a:prstGeom>
-          <a:noFill/>
-        </p:spPr>
-        <p:txBody>
-          <a:bodyPr wrap="square" anchor="ctr">
-            <a:spAutoFit/>
-          </a:bodyPr>
-          <a:lstStyle/>
-          <a:p>
-            <a:pPr algn="l">
-              <a:lnSpc>
-                <a:spcPct val="100000"/>
-              </a:lnSpc>
-            </a:pPr>
-            <a:r>
-              <a:rPr sz="1100" b="0">
-                <a:solidFill>
-                  <a:srgbClr val="94A3B8"/>
-                </a:solidFill>
-                <a:latin typeface="PingFang SC"/>
-              </a:rPr>
-              <a:t>terminal — 平台实测</a:t>
-            </a:r>
-          </a:p>
-        </p:txBody>
-      </p:sp>
-      <p:sp>
-        <p:nvSpPr>
-          <p:cNvPr id="12" name="TextBox 11"/>
-          <p:cNvSpPr txBox="1"/>
-          <p:nvPr/>
-        </p:nvSpPr>
-        <p:spPr>
-          <a:xfrm>
-            <a:off x="1562100" y="1485900"/>
-            <a:ext cx="9067800" cy="4381500"/>
-          </a:xfrm>
-          <a:prstGeom prst="rect">
-            <a:avLst/>
-          </a:prstGeom>
-          <a:noFill/>
-        </p:spPr>
-        <p:txBody>
-          <a:bodyPr wrap="square">
-            <a:spAutoFit/>
-          </a:bodyPr>
-          <a:lstStyle/>
-          <a:p>
-            <a:pPr>
-              <a:lnSpc>
-                <a:spcPct val="115000"/>
-              </a:lnSpc>
-            </a:pPr>
-            <a:r>
-              <a:rPr sz="1300">
-                <a:solidFill>
-                  <a:srgbClr val="CBD5E1"/>
-                </a:solidFill>
-                <a:latin typeface="Menlo"/>
-              </a:rPr>
-              <a:t>tests 真实断言</a:t>
-            </a:r>
-          </a:p>
-        </p:txBody>
-      </p:sp>
-      <p:sp>
-        <p:nvSpPr>
-          <p:cNvPr id="13" name="TextBox 12"/>
-          <p:cNvSpPr txBox="1"/>
-          <p:nvPr/>
-        </p:nvSpPr>
-        <p:spPr>
-          <a:xfrm>
-            <a:off x="10287000" y="6534150"/>
-            <a:ext cx="1619250" cy="266700"/>
-          </a:xfrm>
-          <a:prstGeom prst="rect">
-            <a:avLst/>
-          </a:prstGeom>
-          <a:noFill/>
-        </p:spPr>
-        <p:txBody>
-          <a:bodyPr wrap="square" anchor="ctr">
-            <a:spAutoFit/>
-          </a:bodyPr>
-          <a:lstStyle/>
-          <a:p>
-            <a:pPr algn="r">
-              <a:lnSpc>
-                <a:spcPct val="100000"/>
-              </a:lnSpc>
-            </a:pPr>
-            <a:r>
               <a:rPr sz="900" b="0">
                 <a:solidFill>
                   <a:srgbClr val="94A3B8"/>
@@ -5264,7 +5289,7 @@
       </p:sp>
       <p:sp>
         <p:nvSpPr>
-          <p:cNvPr id="14" name="TextBox 13"/>
+          <p:cNvPr id="13" name="TextBox 12"/>
           <p:cNvSpPr txBox="1"/>
           <p:nvPr/>
         </p:nvSpPr>
@@ -6574,14 +6599,230 @@
       </p:sp>
       <p:sp>
         <p:nvSpPr>
-          <p:cNvPr id="5" name="TextBox 4"/>
+          <p:cNvPr id="5" name="Rounded Rectangle 4"/>
+          <p:cNvSpPr/>
+          <p:nvPr/>
+        </p:nvSpPr>
+        <p:spPr>
+          <a:xfrm>
+            <a:off x="857250" y="2667000"/>
+            <a:ext cx="10477500" cy="1143000"/>
+          </a:xfrm>
+          <a:prstGeom prst="roundRect">
+            <a:avLst>
+              <a:gd name="adj" fmla="val 8000"/>
+            </a:avLst>
+          </a:prstGeom>
+          <a:solidFill>
+            <a:srgbClr val="FFFFFF"/>
+          </a:solidFill>
+          <a:ln w="12700">
+            <a:solidFill>
+              <a:srgbClr val="2563EB"/>
+            </a:solidFill>
+          </a:ln>
+          <a:effectLst/>
+        </p:spPr>
+        <p:style>
+          <a:lnRef idx="1">
+            <a:schemeClr val="accent1"/>
+          </a:lnRef>
+          <a:fillRef idx="3">
+            <a:schemeClr val="accent1"/>
+          </a:fillRef>
+          <a:effectRef idx="2">
+            <a:schemeClr val="accent1"/>
+          </a:effectRef>
+          <a:fontRef idx="minor">
+            <a:schemeClr val="lt1"/>
+          </a:fontRef>
+        </p:style>
+        <p:txBody>
+          <a:bodyPr rtlCol="0" anchor="ctr"/>
+          <a:lstStyle/>
+          <a:p>
+            <a:pPr algn="ctr"/>
+          </a:p>
+        </p:txBody>
+      </p:sp>
+      <p:sp>
+        <p:nvSpPr>
+          <p:cNvPr id="6" name="Rectangle 5"/>
+          <p:cNvSpPr/>
+          <p:nvPr/>
+        </p:nvSpPr>
+        <p:spPr>
+          <a:xfrm>
+            <a:off x="857250" y="2667000"/>
+            <a:ext cx="10477500" cy="57150"/>
+          </a:xfrm>
+          <a:prstGeom prst="rect">
+            <a:avLst/>
+          </a:prstGeom>
+          <a:solidFill>
+            <a:srgbClr val="2563EB"/>
+          </a:solidFill>
+          <a:ln>
+            <a:noFill/>
+          </a:ln>
+          <a:effectLst/>
+        </p:spPr>
+        <p:style>
+          <a:lnRef idx="1">
+            <a:schemeClr val="accent1"/>
+          </a:lnRef>
+          <a:fillRef idx="3">
+            <a:schemeClr val="accent1"/>
+          </a:fillRef>
+          <a:effectRef idx="2">
+            <a:schemeClr val="accent1"/>
+          </a:effectRef>
+          <a:fontRef idx="minor">
+            <a:schemeClr val="lt1"/>
+          </a:fontRef>
+        </p:style>
+        <p:txBody>
+          <a:bodyPr rtlCol="0" anchor="ctr"/>
+          <a:lstStyle/>
+          <a:p>
+            <a:pPr algn="ctr"/>
+          </a:p>
+        </p:txBody>
+      </p:sp>
+      <p:sp>
+        <p:nvSpPr>
+          <p:cNvPr id="7" name="Rounded Rectangle 6"/>
+          <p:cNvSpPr/>
+          <p:nvPr/>
+        </p:nvSpPr>
+        <p:spPr>
+          <a:xfrm>
+            <a:off x="5953125" y="2524125"/>
+            <a:ext cx="285750" cy="285750"/>
+          </a:xfrm>
+          <a:prstGeom prst="roundRect">
+            <a:avLst>
+              <a:gd name="adj" fmla="val 8000"/>
+            </a:avLst>
+          </a:prstGeom>
+          <a:solidFill>
+            <a:srgbClr val="2563EB"/>
+          </a:solidFill>
+          <a:ln>
+            <a:noFill/>
+          </a:ln>
+          <a:effectLst/>
+        </p:spPr>
+        <p:style>
+          <a:lnRef idx="1">
+            <a:schemeClr val="accent1"/>
+          </a:lnRef>
+          <a:fillRef idx="3">
+            <a:schemeClr val="accent1"/>
+          </a:fillRef>
+          <a:effectRef idx="2">
+            <a:schemeClr val="accent1"/>
+          </a:effectRef>
+          <a:fontRef idx="minor">
+            <a:schemeClr val="lt1"/>
+          </a:fontRef>
+        </p:style>
+        <p:txBody>
+          <a:bodyPr rtlCol="0" anchor="ctr"/>
+          <a:lstStyle/>
+          <a:p>
+            <a:pPr algn="ctr"/>
+          </a:p>
+        </p:txBody>
+      </p:sp>
+      <p:sp>
+        <p:nvSpPr>
+          <p:cNvPr id="8" name="TextBox 7"/>
           <p:cNvSpPr txBox="1"/>
           <p:nvPr/>
         </p:nvSpPr>
         <p:spPr>
           <a:xfrm>
-            <a:off x="9334500" y="0"/>
-            <a:ext cx="2667000" cy="704850"/>
+            <a:off x="5953125" y="2514600"/>
+            <a:ext cx="285750" cy="285750"/>
+          </a:xfrm>
+          <a:prstGeom prst="rect">
+            <a:avLst/>
+          </a:prstGeom>
+          <a:noFill/>
+        </p:spPr>
+        <p:txBody>
+          <a:bodyPr wrap="square" anchor="ctr">
+            <a:spAutoFit/>
+          </a:bodyPr>
+          <a:lstStyle/>
+          <a:p>
+            <a:pPr algn="ctr">
+              <a:lnSpc>
+                <a:spcPct val="100000"/>
+              </a:lnSpc>
+            </a:pPr>
+            <a:r>
+              <a:rPr sz="1300" b="1">
+                <a:solidFill>
+                  <a:srgbClr val="FFFFFF"/>
+                </a:solidFill>
+                <a:latin typeface="PingFang SC"/>
+              </a:rPr>
+              <a:t>1</a:t>
+            </a:r>
+          </a:p>
+        </p:txBody>
+      </p:sp>
+      <p:sp>
+        <p:nvSpPr>
+          <p:cNvPr id="9" name="TextBox 8"/>
+          <p:cNvSpPr txBox="1"/>
+          <p:nvPr/>
+        </p:nvSpPr>
+        <p:spPr>
+          <a:xfrm>
+            <a:off x="933450" y="2800350"/>
+            <a:ext cx="10325100" cy="952500"/>
+          </a:xfrm>
+          <a:prstGeom prst="rect">
+            <a:avLst/>
+          </a:prstGeom>
+          <a:noFill/>
+        </p:spPr>
+        <p:txBody>
+          <a:bodyPr wrap="square" anchor="ctr">
+            <a:spAutoFit/>
+          </a:bodyPr>
+          <a:lstStyle/>
+          <a:p>
+            <a:pPr algn="ctr">
+              <a:lnSpc>
+                <a:spcPct val="100000"/>
+              </a:lnSpc>
+            </a:pPr>
+            <a:r>
+              <a:rPr sz="1200" b="1">
+                <a:solidFill>
+                  <a:srgbClr val="475569"/>
+                </a:solidFill>
+                <a:latin typeface="PingFang SC"/>
+              </a:rPr>
+              <a:t>note=锚点=最小可恢复集</a:t>
+            </a:r>
+          </a:p>
+        </p:txBody>
+      </p:sp>
+      <p:sp>
+        <p:nvSpPr>
+          <p:cNvPr id="10" name="TextBox 9"/>
+          <p:cNvSpPr txBox="1"/>
+          <p:nvPr/>
+        </p:nvSpPr>
+        <p:spPr>
+          <a:xfrm>
+            <a:off x="10287000" y="6534150"/>
+            <a:ext cx="1619250" cy="266700"/>
           </a:xfrm>
           <a:prstGeom prst="rect">
             <a:avLst/>
@@ -6600,261 +6841,6 @@
               </a:lnSpc>
             </a:pPr>
             <a:r>
-              <a:rPr sz="1100" b="0">
-                <a:solidFill>
-                  <a:srgbClr val="94A3B8"/>
-                </a:solidFill>
-                <a:latin typeface="PingFang SC"/>
-              </a:rPr>
-              <a:t>断点续跑的认知层</a:t>
-            </a:r>
-          </a:p>
-        </p:txBody>
-      </p:sp>
-      <p:sp>
-        <p:nvSpPr>
-          <p:cNvPr id="6" name="Rounded Rectangle 5"/>
-          <p:cNvSpPr/>
-          <p:nvPr/>
-        </p:nvSpPr>
-        <p:spPr>
-          <a:xfrm>
-            <a:off x="857250" y="2667000"/>
-            <a:ext cx="10477500" cy="1143000"/>
-          </a:xfrm>
-          <a:prstGeom prst="roundRect">
-            <a:avLst>
-              <a:gd name="adj" fmla="val 8000"/>
-            </a:avLst>
-          </a:prstGeom>
-          <a:solidFill>
-            <a:srgbClr val="FFFFFF"/>
-          </a:solidFill>
-          <a:ln w="12700">
-            <a:solidFill>
-              <a:srgbClr val="2563EB"/>
-            </a:solidFill>
-          </a:ln>
-          <a:effectLst/>
-        </p:spPr>
-        <p:style>
-          <a:lnRef idx="1">
-            <a:schemeClr val="accent1"/>
-          </a:lnRef>
-          <a:fillRef idx="3">
-            <a:schemeClr val="accent1"/>
-          </a:fillRef>
-          <a:effectRef idx="2">
-            <a:schemeClr val="accent1"/>
-          </a:effectRef>
-          <a:fontRef idx="minor">
-            <a:schemeClr val="lt1"/>
-          </a:fontRef>
-        </p:style>
-        <p:txBody>
-          <a:bodyPr rtlCol="0" anchor="ctr"/>
-          <a:lstStyle/>
-          <a:p>
-            <a:pPr algn="ctr"/>
-          </a:p>
-        </p:txBody>
-      </p:sp>
-      <p:sp>
-        <p:nvSpPr>
-          <p:cNvPr id="7" name="Rectangle 6"/>
-          <p:cNvSpPr/>
-          <p:nvPr/>
-        </p:nvSpPr>
-        <p:spPr>
-          <a:xfrm>
-            <a:off x="857250" y="2667000"/>
-            <a:ext cx="10477500" cy="57150"/>
-          </a:xfrm>
-          <a:prstGeom prst="rect">
-            <a:avLst/>
-          </a:prstGeom>
-          <a:solidFill>
-            <a:srgbClr val="2563EB"/>
-          </a:solidFill>
-          <a:ln>
-            <a:noFill/>
-          </a:ln>
-          <a:effectLst/>
-        </p:spPr>
-        <p:style>
-          <a:lnRef idx="1">
-            <a:schemeClr val="accent1"/>
-          </a:lnRef>
-          <a:fillRef idx="3">
-            <a:schemeClr val="accent1"/>
-          </a:fillRef>
-          <a:effectRef idx="2">
-            <a:schemeClr val="accent1"/>
-          </a:effectRef>
-          <a:fontRef idx="minor">
-            <a:schemeClr val="lt1"/>
-          </a:fontRef>
-        </p:style>
-        <p:txBody>
-          <a:bodyPr rtlCol="0" anchor="ctr"/>
-          <a:lstStyle/>
-          <a:p>
-            <a:pPr algn="ctr"/>
-          </a:p>
-        </p:txBody>
-      </p:sp>
-      <p:sp>
-        <p:nvSpPr>
-          <p:cNvPr id="8" name="Rounded Rectangle 7"/>
-          <p:cNvSpPr/>
-          <p:nvPr/>
-        </p:nvSpPr>
-        <p:spPr>
-          <a:xfrm>
-            <a:off x="5953125" y="2524125"/>
-            <a:ext cx="285750" cy="285750"/>
-          </a:xfrm>
-          <a:prstGeom prst="roundRect">
-            <a:avLst>
-              <a:gd name="adj" fmla="val 8000"/>
-            </a:avLst>
-          </a:prstGeom>
-          <a:solidFill>
-            <a:srgbClr val="2563EB"/>
-          </a:solidFill>
-          <a:ln>
-            <a:noFill/>
-          </a:ln>
-          <a:effectLst/>
-        </p:spPr>
-        <p:style>
-          <a:lnRef idx="1">
-            <a:schemeClr val="accent1"/>
-          </a:lnRef>
-          <a:fillRef idx="3">
-            <a:schemeClr val="accent1"/>
-          </a:fillRef>
-          <a:effectRef idx="2">
-            <a:schemeClr val="accent1"/>
-          </a:effectRef>
-          <a:fontRef idx="minor">
-            <a:schemeClr val="lt1"/>
-          </a:fontRef>
-        </p:style>
-        <p:txBody>
-          <a:bodyPr rtlCol="0" anchor="ctr"/>
-          <a:lstStyle/>
-          <a:p>
-            <a:pPr algn="ctr"/>
-          </a:p>
-        </p:txBody>
-      </p:sp>
-      <p:sp>
-        <p:nvSpPr>
-          <p:cNvPr id="9" name="TextBox 8"/>
-          <p:cNvSpPr txBox="1"/>
-          <p:nvPr/>
-        </p:nvSpPr>
-        <p:spPr>
-          <a:xfrm>
-            <a:off x="5953125" y="2514600"/>
-            <a:ext cx="285750" cy="285750"/>
-          </a:xfrm>
-          <a:prstGeom prst="rect">
-            <a:avLst/>
-          </a:prstGeom>
-          <a:noFill/>
-        </p:spPr>
-        <p:txBody>
-          <a:bodyPr wrap="square" anchor="ctr">
-            <a:spAutoFit/>
-          </a:bodyPr>
-          <a:lstStyle/>
-          <a:p>
-            <a:pPr algn="ctr">
-              <a:lnSpc>
-                <a:spcPct val="100000"/>
-              </a:lnSpc>
-            </a:pPr>
-            <a:r>
-              <a:rPr sz="1300" b="1">
-                <a:solidFill>
-                  <a:srgbClr val="FFFFFF"/>
-                </a:solidFill>
-                <a:latin typeface="PingFang SC"/>
-              </a:rPr>
-              <a:t>1</a:t>
-            </a:r>
-          </a:p>
-        </p:txBody>
-      </p:sp>
-      <p:sp>
-        <p:nvSpPr>
-          <p:cNvPr id="10" name="TextBox 9"/>
-          <p:cNvSpPr txBox="1"/>
-          <p:nvPr/>
-        </p:nvSpPr>
-        <p:spPr>
-          <a:xfrm>
-            <a:off x="933450" y="2800350"/>
-            <a:ext cx="10325100" cy="952500"/>
-          </a:xfrm>
-          <a:prstGeom prst="rect">
-            <a:avLst/>
-          </a:prstGeom>
-          <a:noFill/>
-        </p:spPr>
-        <p:txBody>
-          <a:bodyPr wrap="square" anchor="ctr">
-            <a:spAutoFit/>
-          </a:bodyPr>
-          <a:lstStyle/>
-          <a:p>
-            <a:pPr algn="ctr">
-              <a:lnSpc>
-                <a:spcPct val="100000"/>
-              </a:lnSpc>
-            </a:pPr>
-            <a:r>
-              <a:rPr sz="1200" b="1">
-                <a:solidFill>
-                  <a:srgbClr val="475569"/>
-                </a:solidFill>
-                <a:latin typeface="PingFang SC"/>
-              </a:rPr>
-              <a:t>note=锚点=最小可恢复集|断点续跑的认知层</a:t>
-            </a:r>
-          </a:p>
-        </p:txBody>
-      </p:sp>
-      <p:sp>
-        <p:nvSpPr>
-          <p:cNvPr id="11" name="TextBox 10"/>
-          <p:cNvSpPr txBox="1"/>
-          <p:nvPr/>
-        </p:nvSpPr>
-        <p:spPr>
-          <a:xfrm>
-            <a:off x="10287000" y="6534150"/>
-            <a:ext cx="1619250" cy="266700"/>
-          </a:xfrm>
-          <a:prstGeom prst="rect">
-            <a:avLst/>
-          </a:prstGeom>
-          <a:noFill/>
-        </p:spPr>
-        <p:txBody>
-          <a:bodyPr wrap="square" anchor="ctr">
-            <a:spAutoFit/>
-          </a:bodyPr>
-          <a:lstStyle/>
-          <a:p>
-            <a:pPr algn="r">
-              <a:lnSpc>
-                <a:spcPct val="100000"/>
-              </a:lnSpc>
-            </a:pPr>
-            <a:r>
               <a:rPr sz="900" b="0">
                 <a:solidFill>
                   <a:srgbClr val="94A3B8"/>
@@ -6868,7 +6854,7 @@
       </p:sp>
       <p:sp>
         <p:nvSpPr>
-          <p:cNvPr id="12" name="TextBox 11"/>
+          <p:cNvPr id="11" name="TextBox 10"/>
           <p:cNvSpPr txBox="1"/>
           <p:nvPr/>
         </p:nvSpPr>
@@ -17872,8 +17858,8 @@
         </p:nvSpPr>
         <p:spPr>
           <a:xfrm>
-            <a:off x="3714750" y="1905000"/>
-            <a:ext cx="2228850" cy="1047750"/>
+            <a:off x="2524125" y="2000250"/>
+            <a:ext cx="2190750" cy="552450"/>
           </a:xfrm>
           <a:prstGeom prst="roundRect">
             <a:avLst>
@@ -17918,8 +17904,8 @@
         </p:nvSpPr>
         <p:spPr>
           <a:xfrm>
-            <a:off x="3714750" y="1905000"/>
-            <a:ext cx="2228850" cy="1047750"/>
+            <a:off x="2524125" y="2000250"/>
+            <a:ext cx="2190750" cy="552450"/>
           </a:xfrm>
           <a:prstGeom prst="rect">
             <a:avLst/>
@@ -17957,8 +17943,8 @@
         </p:nvSpPr>
         <p:spPr>
           <a:xfrm>
-            <a:off x="6096000" y="1905000"/>
-            <a:ext cx="2228850" cy="1047750"/>
+            <a:off x="7477125" y="2000250"/>
+            <a:ext cx="2190750" cy="552450"/>
           </a:xfrm>
           <a:prstGeom prst="roundRect">
             <a:avLst>
@@ -18005,8 +17991,8 @@
         </p:nvSpPr>
         <p:spPr>
           <a:xfrm>
-            <a:off x="6096000" y="1905000"/>
-            <a:ext cx="2228850" cy="1047750"/>
+            <a:off x="7477125" y="2000250"/>
+            <a:ext cx="2190750" cy="552450"/>
           </a:xfrm>
           <a:prstGeom prst="rect">
             <a:avLst/>
@@ -18027,7 +18013,7 @@
             <a:r>
               <a:rPr sz="1300" b="1">
                 <a:solidFill>
-                  <a:srgbClr val="475569"/>
+                  <a:srgbClr val="0B1D3A"/>
                 </a:solidFill>
                 <a:latin typeface="PingFang SC"/>
               </a:rPr>
@@ -18044,8 +18030,8 @@
         </p:nvSpPr>
         <p:spPr>
           <a:xfrm>
-            <a:off x="3714750" y="3524250"/>
-            <a:ext cx="2228850" cy="1047750"/>
+            <a:off x="2524125" y="3429000"/>
+            <a:ext cx="2190750" cy="552450"/>
           </a:xfrm>
           <a:prstGeom prst="roundRect">
             <a:avLst>
@@ -18092,8 +18078,8 @@
         </p:nvSpPr>
         <p:spPr>
           <a:xfrm>
-            <a:off x="3714750" y="3524250"/>
-            <a:ext cx="2228850" cy="1047750"/>
+            <a:off x="2524125" y="3429000"/>
+            <a:ext cx="2190750" cy="552450"/>
           </a:xfrm>
           <a:prstGeom prst="rect">
             <a:avLst/>
@@ -18114,7 +18100,7 @@
             <a:r>
               <a:rPr sz="1300" b="1">
                 <a:solidFill>
-                  <a:srgbClr val="475569"/>
+                  <a:srgbClr val="0B1D3A"/>
                 </a:solidFill>
                 <a:latin typeface="PingFang SC"/>
               </a:rPr>
@@ -18131,8 +18117,8 @@
         </p:nvSpPr>
         <p:spPr>
           <a:xfrm>
-            <a:off x="6096000" y="3524250"/>
-            <a:ext cx="2228850" cy="1047750"/>
+            <a:off x="7477125" y="3429000"/>
+            <a:ext cx="2190750" cy="552450"/>
           </a:xfrm>
           <a:prstGeom prst="roundRect">
             <a:avLst>
@@ -18179,8 +18165,8 @@
         </p:nvSpPr>
         <p:spPr>
           <a:xfrm>
-            <a:off x="6096000" y="3524250"/>
-            <a:ext cx="2228850" cy="1047750"/>
+            <a:off x="7477125" y="3429000"/>
+            <a:ext cx="2190750" cy="552450"/>
           </a:xfrm>
           <a:prstGeom prst="rect">
             <a:avLst/>
@@ -18201,7 +18187,7 @@
             <a:r>
               <a:rPr sz="1300" b="1">
                 <a:solidFill>
-                  <a:srgbClr val="475569"/>
+                  <a:srgbClr val="0B1D3A"/>
                 </a:solidFill>
                 <a:latin typeface="PingFang SC"/>
               </a:rPr>
@@ -18218,15 +18204,15 @@
         </p:nvCxnSpPr>
         <p:spPr>
           <a:xfrm>
-            <a:off x="5943600" y="2428875"/>
-            <a:ext cx="152400" cy="0"/>
+            <a:off x="4714875" y="2276475"/>
+            <a:ext cx="2695575" cy="0"/>
           </a:xfrm>
           <a:prstGeom prst="line">
             <a:avLst/>
           </a:prstGeom>
-          <a:ln w="17780">
+          <a:ln w="19050">
             <a:solidFill>
-              <a:srgbClr val="475569"/>
+              <a:srgbClr val="2563EB"/>
             </a:solidFill>
           </a:ln>
         </p:spPr>
@@ -18253,14 +18239,14 @@
         </p:nvSpPr>
         <p:spPr>
           <a:xfrm rot="5400000">
-            <a:off x="6010276" y="2386013"/>
+            <a:off x="7324726" y="2233613"/>
             <a:ext cx="85725" cy="85725"/>
           </a:xfrm>
           <a:prstGeom prst="triangle">
             <a:avLst/>
           </a:prstGeom>
           <a:solidFill>
-            <a:srgbClr val="475569"/>
+            <a:srgbClr val="2563EB"/>
           </a:solidFill>
           <a:ln>
             <a:noFill/>
@@ -18291,14 +18277,62 @@
       </p:sp>
       <p:sp>
         <p:nvSpPr>
-          <p:cNvPr id="15" name="TextBox 14"/>
+          <p:cNvPr id="15" name="Rounded Rectangle 14"/>
+          <p:cNvSpPr/>
+          <p:nvPr/>
+        </p:nvSpPr>
+        <p:spPr>
+          <a:xfrm>
+            <a:off x="5500687" y="2133600"/>
+            <a:ext cx="1123950" cy="285750"/>
+          </a:xfrm>
+          <a:prstGeom prst="roundRect">
+            <a:avLst>
+              <a:gd name="adj" fmla="val 8000"/>
+            </a:avLst>
+          </a:prstGeom>
+          <a:solidFill>
+            <a:srgbClr val="FFFFFF"/>
+          </a:solidFill>
+          <a:ln w="12700">
+            <a:solidFill>
+              <a:srgbClr val="DDE5EE"/>
+            </a:solidFill>
+          </a:ln>
+          <a:effectLst/>
+        </p:spPr>
+        <p:style>
+          <a:lnRef idx="1">
+            <a:schemeClr val="accent1"/>
+          </a:lnRef>
+          <a:fillRef idx="3">
+            <a:schemeClr val="accent1"/>
+          </a:fillRef>
+          <a:effectRef idx="2">
+            <a:schemeClr val="accent1"/>
+          </a:effectRef>
+          <a:fontRef idx="minor">
+            <a:schemeClr val="lt1"/>
+          </a:fontRef>
+        </p:style>
+        <p:txBody>
+          <a:bodyPr rtlCol="0" anchor="ctr"/>
+          <a:lstStyle/>
+          <a:p>
+            <a:pPr algn="ctr"/>
+          </a:p>
+        </p:txBody>
+      </p:sp>
+      <p:sp>
+        <p:nvSpPr>
+          <p:cNvPr id="16" name="TextBox 15"/>
           <p:cNvSpPr txBox="1"/>
           <p:nvPr/>
         </p:nvSpPr>
         <p:spPr>
           <a:xfrm>
-            <a:off x="5162550" y="2105025"/>
-            <a:ext cx="1714500" cy="228600"/>
+            <a:off x="5500687" y="2133600"/>
+            <a:ext cx="1123950" cy="285750"/>
           </a:xfrm>
           <a:prstGeom prst="rect">
             <a:avLst/>
@@ -18317,9 +18351,9 @@
               </a:lnSpc>
             </a:pPr>
             <a:r>
-              <a:rPr sz="900" b="0">
-                <a:solidFill>
-                  <a:srgbClr val="94A3B8"/>
+              <a:rPr sz="1100" b="1">
+                <a:solidFill>
+                  <a:srgbClr val="0B1D3A"/>
                 </a:solidFill>
                 <a:latin typeface="PingFang SC"/>
               </a:rPr>
@@ -18330,23 +18364,25 @@
       </p:sp>
       <p:cxnSp>
         <p:nvCxnSpPr>
-          <p:cNvPr id="16" name="Connector 15"/>
+          <p:cNvPr id="17" name="Connector 16"/>
           <p:cNvCxnSpPr/>
           <p:nvPr/>
         </p:nvCxnSpPr>
         <p:spPr>
-          <a:xfrm>
-            <a:off x="7210425" y="2428875"/>
-            <a:ext cx="1114425" cy="0"/>
+          <a:xfrm flipV="1">
+            <a:off x="8572500" y="1562100"/>
+            <a:ext cx="0" cy="419100"/>
           </a:xfrm>
           <a:prstGeom prst="line">
             <a:avLst/>
           </a:prstGeom>
-          <a:ln w="17780">
+          <a:ln w="12700">
             <a:solidFill>
-              <a:srgbClr val="475569"/>
+              <a:srgbClr val="DDE5EE"/>
             </a:solidFill>
-          </a:ln>
+            <a:prstDash val="dash"/>
+          </a:ln>
+          <a:effectLst/>
         </p:spPr>
         <p:style>
           <a:lnRef idx="2">
@@ -18363,22 +18399,242 @@
           </a:fontRef>
         </p:style>
       </p:cxnSp>
-      <p:sp>
-        <p:nvSpPr>
-          <p:cNvPr id="17" name="Isosceles Triangle 16"/>
+      <p:cxnSp>
+        <p:nvCxnSpPr>
+          <p:cNvPr id="18" name="Connector 17"/>
+          <p:cNvCxnSpPr/>
+          <p:nvPr/>
+        </p:nvCxnSpPr>
+        <p:spPr>
+          <a:xfrm>
+            <a:off x="8572500" y="1562100"/>
+            <a:ext cx="0" cy="0"/>
+          </a:xfrm>
+          <a:prstGeom prst="line">
+            <a:avLst/>
+          </a:prstGeom>
+          <a:ln w="12700">
+            <a:solidFill>
+              <a:srgbClr val="DDE5EE"/>
+            </a:solidFill>
+            <a:prstDash val="dash"/>
+          </a:ln>
+          <a:effectLst/>
+        </p:spPr>
+        <p:style>
+          <a:lnRef idx="2">
+            <a:schemeClr val="accent1"/>
+          </a:lnRef>
+          <a:fillRef idx="0">
+            <a:schemeClr val="accent1"/>
+          </a:fillRef>
+          <a:effectRef idx="1">
+            <a:schemeClr val="accent1"/>
+          </a:effectRef>
+          <a:fontRef idx="minor">
+            <a:schemeClr val="tx1"/>
+          </a:fontRef>
+        </p:style>
+      </p:cxnSp>
+      <p:cxnSp>
+        <p:nvCxnSpPr>
+          <p:cNvPr id="19" name="Connector 18"/>
+          <p:cNvCxnSpPr/>
+          <p:nvPr/>
+        </p:nvCxnSpPr>
+        <p:spPr>
+          <a:xfrm>
+            <a:off x="8572500" y="1562100"/>
+            <a:ext cx="0" cy="352425"/>
+          </a:xfrm>
+          <a:prstGeom prst="line">
+            <a:avLst/>
+          </a:prstGeom>
+          <a:ln w="12700">
+            <a:solidFill>
+              <a:srgbClr val="DDE5EE"/>
+            </a:solidFill>
+            <a:prstDash val="dash"/>
+          </a:ln>
+          <a:effectLst/>
+        </p:spPr>
+        <p:style>
+          <a:lnRef idx="2">
+            <a:schemeClr val="accent1"/>
+          </a:lnRef>
+          <a:fillRef idx="0">
+            <a:schemeClr val="accent1"/>
+          </a:fillRef>
+          <a:effectRef idx="1">
+            <a:schemeClr val="accent1"/>
+          </a:effectRef>
+          <a:fontRef idx="minor">
+            <a:schemeClr val="tx1"/>
+          </a:fontRef>
+        </p:style>
+      </p:cxnSp>
+      <p:cxnSp>
+        <p:nvCxnSpPr>
+          <p:cNvPr id="20" name="Connector 19"/>
+          <p:cNvCxnSpPr/>
+          <p:nvPr/>
+        </p:nvCxnSpPr>
+        <p:spPr>
+          <a:xfrm flipV="1">
+            <a:off x="8572500" y="1562100"/>
+            <a:ext cx="0" cy="419100"/>
+          </a:xfrm>
+          <a:prstGeom prst="line">
+            <a:avLst/>
+          </a:prstGeom>
+          <a:ln w="12700">
+            <a:solidFill>
+              <a:srgbClr val="DDE5EE"/>
+            </a:solidFill>
+            <a:prstDash val="dash"/>
+          </a:ln>
+          <a:effectLst/>
+        </p:spPr>
+        <p:style>
+          <a:lnRef idx="2">
+            <a:schemeClr val="accent1"/>
+          </a:lnRef>
+          <a:fillRef idx="0">
+            <a:schemeClr val="accent1"/>
+          </a:fillRef>
+          <a:effectRef idx="1">
+            <a:schemeClr val="accent1"/>
+          </a:effectRef>
+          <a:fontRef idx="minor">
+            <a:schemeClr val="tx1"/>
+          </a:fontRef>
+        </p:style>
+      </p:cxnSp>
+      <p:cxnSp>
+        <p:nvCxnSpPr>
+          <p:cNvPr id="21" name="Connector 20"/>
+          <p:cNvCxnSpPr/>
+          <p:nvPr/>
+        </p:nvCxnSpPr>
+        <p:spPr>
+          <a:xfrm flipH="1">
+            <a:off x="3619500" y="1562100"/>
+            <a:ext cx="4953000" cy="0"/>
+          </a:xfrm>
+          <a:prstGeom prst="line">
+            <a:avLst/>
+          </a:prstGeom>
+          <a:ln w="12700">
+            <a:solidFill>
+              <a:srgbClr val="DDE5EE"/>
+            </a:solidFill>
+            <a:prstDash val="dash"/>
+          </a:ln>
+          <a:effectLst/>
+        </p:spPr>
+        <p:style>
+          <a:lnRef idx="2">
+            <a:schemeClr val="accent1"/>
+          </a:lnRef>
+          <a:fillRef idx="0">
+            <a:schemeClr val="accent1"/>
+          </a:fillRef>
+          <a:effectRef idx="1">
+            <a:schemeClr val="accent1"/>
+          </a:effectRef>
+          <a:fontRef idx="minor">
+            <a:schemeClr val="tx1"/>
+          </a:fontRef>
+        </p:style>
+      </p:cxnSp>
+      <p:cxnSp>
+        <p:nvCxnSpPr>
+          <p:cNvPr id="22" name="Connector 21"/>
+          <p:cNvCxnSpPr/>
+          <p:nvPr/>
+        </p:nvCxnSpPr>
+        <p:spPr>
+          <a:xfrm>
+            <a:off x="3619500" y="1562100"/>
+            <a:ext cx="0" cy="1781175"/>
+          </a:xfrm>
+          <a:prstGeom prst="line">
+            <a:avLst/>
+          </a:prstGeom>
+          <a:ln w="12700">
+            <a:solidFill>
+              <a:srgbClr val="DDE5EE"/>
+            </a:solidFill>
+            <a:prstDash val="dash"/>
+          </a:ln>
+          <a:effectLst/>
+        </p:spPr>
+        <p:style>
+          <a:lnRef idx="2">
+            <a:schemeClr val="accent1"/>
+          </a:lnRef>
+          <a:fillRef idx="0">
+            <a:schemeClr val="accent1"/>
+          </a:fillRef>
+          <a:effectRef idx="1">
+            <a:schemeClr val="accent1"/>
+          </a:effectRef>
+          <a:fontRef idx="minor">
+            <a:schemeClr val="tx1"/>
+          </a:fontRef>
+        </p:style>
+      </p:cxnSp>
+      <p:cxnSp>
+        <p:nvCxnSpPr>
+          <p:cNvPr id="23" name="Connector 22"/>
+          <p:cNvCxnSpPr/>
+          <p:nvPr/>
+        </p:nvCxnSpPr>
+        <p:spPr>
+          <a:xfrm>
+            <a:off x="4714875" y="3705225"/>
+            <a:ext cx="2695575" cy="0"/>
+          </a:xfrm>
+          <a:prstGeom prst="line">
+            <a:avLst/>
+          </a:prstGeom>
+          <a:ln w="19050">
+            <a:solidFill>
+              <a:srgbClr val="2563EB"/>
+            </a:solidFill>
+          </a:ln>
+        </p:spPr>
+        <p:style>
+          <a:lnRef idx="2">
+            <a:schemeClr val="accent1"/>
+          </a:lnRef>
+          <a:fillRef idx="0">
+            <a:schemeClr val="accent1"/>
+          </a:fillRef>
+          <a:effectRef idx="1">
+            <a:schemeClr val="accent1"/>
+          </a:effectRef>
+          <a:fontRef idx="minor">
+            <a:schemeClr val="tx1"/>
+          </a:fontRef>
+        </p:style>
+      </p:cxnSp>
+      <p:sp>
+        <p:nvSpPr>
+          <p:cNvPr id="24" name="Isosceles Triangle 23"/>
           <p:cNvSpPr/>
           <p:nvPr/>
         </p:nvSpPr>
         <p:spPr>
           <a:xfrm rot="5400000">
-            <a:off x="8239126" y="2386013"/>
+            <a:off x="7324726" y="3662363"/>
             <a:ext cx="85725" cy="85725"/>
           </a:xfrm>
           <a:prstGeom prst="triangle">
             <a:avLst/>
           </a:prstGeom>
           <a:solidFill>
-            <a:srgbClr val="475569"/>
+            <a:srgbClr val="2563EB"/>
           </a:solidFill>
           <a:ln>
             <a:noFill/>
@@ -18409,14 +18665,62 @@
       </p:sp>
       <p:sp>
         <p:nvSpPr>
-          <p:cNvPr id="18" name="TextBox 17"/>
+          <p:cNvPr id="25" name="Rounded Rectangle 24"/>
+          <p:cNvSpPr/>
+          <p:nvPr/>
+        </p:nvSpPr>
+        <p:spPr>
+          <a:xfrm>
+            <a:off x="5500687" y="3562350"/>
+            <a:ext cx="1123950" cy="285750"/>
+          </a:xfrm>
+          <a:prstGeom prst="roundRect">
+            <a:avLst>
+              <a:gd name="adj" fmla="val 8000"/>
+            </a:avLst>
+          </a:prstGeom>
+          <a:solidFill>
+            <a:srgbClr val="FFFFFF"/>
+          </a:solidFill>
+          <a:ln w="12700">
+            <a:solidFill>
+              <a:srgbClr val="DDE5EE"/>
+            </a:solidFill>
+          </a:ln>
+          <a:effectLst/>
+        </p:spPr>
+        <p:style>
+          <a:lnRef idx="1">
+            <a:schemeClr val="accent1"/>
+          </a:lnRef>
+          <a:fillRef idx="3">
+            <a:schemeClr val="accent1"/>
+          </a:fillRef>
+          <a:effectRef idx="2">
+            <a:schemeClr val="accent1"/>
+          </a:effectRef>
+          <a:fontRef idx="minor">
+            <a:schemeClr val="lt1"/>
+          </a:fontRef>
+        </p:style>
+        <p:txBody>
+          <a:bodyPr rtlCol="0" anchor="ctr"/>
+          <a:lstStyle/>
+          <a:p>
+            <a:pPr algn="ctr"/>
+          </a:p>
+        </p:txBody>
+      </p:sp>
+      <p:sp>
+        <p:nvSpPr>
+          <p:cNvPr id="26" name="TextBox 25"/>
           <p:cNvSpPr txBox="1"/>
           <p:nvPr/>
         </p:nvSpPr>
         <p:spPr>
           <a:xfrm>
-            <a:off x="6834187" y="2105025"/>
-            <a:ext cx="1714500" cy="228600"/>
+            <a:off x="5500687" y="3562350"/>
+            <a:ext cx="1123950" cy="285750"/>
           </a:xfrm>
           <a:prstGeom prst="rect">
             <a:avLst/>
@@ -18435,256 +18739,20 @@
               </a:lnSpc>
             </a:pPr>
             <a:r>
-              <a:rPr sz="900" b="0">
-                <a:solidFill>
-                  <a:srgbClr val="94A3B8"/>
+              <a:rPr sz="1100" b="1">
+                <a:solidFill>
+                  <a:srgbClr val="0B1D3A"/>
                 </a:solidFill>
                 <a:latin typeface="PingFang SC"/>
               </a:rPr>
-              <a:t>步骤/观察写入</a:t>
-            </a:r>
-          </a:p>
-        </p:txBody>
-      </p:sp>
-      <p:cxnSp>
-        <p:nvCxnSpPr>
-          <p:cNvPr id="19" name="Connector 18"/>
-          <p:cNvCxnSpPr/>
-          <p:nvPr/>
-        </p:nvCxnSpPr>
-        <p:spPr>
-          <a:xfrm flipH="1">
-            <a:off x="5943600" y="2428875"/>
-            <a:ext cx="1266825" cy="1619250"/>
-          </a:xfrm>
-          <a:prstGeom prst="line">
-            <a:avLst/>
-          </a:prstGeom>
-          <a:ln w="17780">
-            <a:solidFill>
-              <a:srgbClr val="475569"/>
-            </a:solidFill>
-          </a:ln>
-        </p:spPr>
-        <p:style>
-          <a:lnRef idx="2">
-            <a:schemeClr val="accent1"/>
-          </a:lnRef>
-          <a:fillRef idx="0">
-            <a:schemeClr val="accent1"/>
-          </a:fillRef>
-          <a:effectRef idx="1">
-            <a:schemeClr val="accent1"/>
-          </a:effectRef>
-          <a:fontRef idx="minor">
-            <a:schemeClr val="tx1"/>
-          </a:fontRef>
-        </p:style>
-      </p:cxnSp>
-      <p:sp>
-        <p:nvSpPr>
-          <p:cNvPr id="20" name="Isosceles Triangle 19"/>
-          <p:cNvSpPr/>
-          <p:nvPr/>
-        </p:nvSpPr>
-        <p:spPr>
-          <a:xfrm rot="13082277">
-            <a:off x="5927149" y="3971505"/>
-            <a:ext cx="85725" cy="85725"/>
-          </a:xfrm>
-          <a:prstGeom prst="triangle">
-            <a:avLst/>
-          </a:prstGeom>
-          <a:solidFill>
-            <a:srgbClr val="475569"/>
-          </a:solidFill>
-          <a:ln>
-            <a:noFill/>
-          </a:ln>
-          <a:effectLst/>
-        </p:spPr>
-        <p:style>
-          <a:lnRef idx="1">
-            <a:schemeClr val="accent1"/>
-          </a:lnRef>
-          <a:fillRef idx="3">
-            <a:schemeClr val="accent1"/>
-          </a:fillRef>
-          <a:effectRef idx="2">
-            <a:schemeClr val="accent1"/>
-          </a:effectRef>
-          <a:fontRef idx="minor">
-            <a:schemeClr val="lt1"/>
-          </a:fontRef>
-        </p:style>
-        <p:txBody>
-          <a:bodyPr rtlCol="0" anchor="ctr"/>
-          <a:lstStyle/>
-          <a:p>
-            <a:pPr algn="ctr"/>
-          </a:p>
-        </p:txBody>
-      </p:sp>
-      <p:sp>
-        <p:nvSpPr>
-          <p:cNvPr id="21" name="TextBox 20"/>
-          <p:cNvSpPr txBox="1"/>
-          <p:nvPr/>
-        </p:nvSpPr>
-        <p:spPr>
-          <a:xfrm>
-            <a:off x="5643562" y="2105025"/>
-            <a:ext cx="1714500" cy="228600"/>
-          </a:xfrm>
-          <a:prstGeom prst="rect">
-            <a:avLst/>
-          </a:prstGeom>
-          <a:noFill/>
-        </p:spPr>
-        <p:txBody>
-          <a:bodyPr wrap="square" anchor="ctr">
-            <a:spAutoFit/>
-          </a:bodyPr>
-          <a:lstStyle/>
-          <a:p>
-            <a:pPr algn="ctr">
-              <a:lnSpc>
-                <a:spcPct val="100000"/>
-              </a:lnSpc>
-            </a:pPr>
-            <a:r>
-              <a:rPr sz="900" b="0">
-                <a:solidFill>
-                  <a:srgbClr val="94A3B8"/>
-                </a:solidFill>
-                <a:latin typeface="PingFang SC"/>
-              </a:rPr>
-              <a:t>任务完成提炼</a:t>
-            </a:r>
-          </a:p>
-        </p:txBody>
-      </p:sp>
-      <p:cxnSp>
-        <p:nvCxnSpPr>
-          <p:cNvPr id="22" name="Connector 21"/>
-          <p:cNvCxnSpPr/>
-          <p:nvPr/>
-        </p:nvCxnSpPr>
-        <p:spPr>
-          <a:xfrm>
-            <a:off x="5943600" y="4048125"/>
-            <a:ext cx="152400" cy="0"/>
-          </a:xfrm>
-          <a:prstGeom prst="line">
-            <a:avLst/>
-          </a:prstGeom>
-          <a:ln w="17780">
-            <a:solidFill>
-              <a:srgbClr val="475569"/>
-            </a:solidFill>
-          </a:ln>
-        </p:spPr>
-        <p:style>
-          <a:lnRef idx="2">
-            <a:schemeClr val="accent1"/>
-          </a:lnRef>
-          <a:fillRef idx="0">
-            <a:schemeClr val="accent1"/>
-          </a:fillRef>
-          <a:effectRef idx="1">
-            <a:schemeClr val="accent1"/>
-          </a:effectRef>
-          <a:fontRef idx="minor">
-            <a:schemeClr val="tx1"/>
-          </a:fontRef>
-        </p:style>
-      </p:cxnSp>
-      <p:sp>
-        <p:nvSpPr>
-          <p:cNvPr id="23" name="Isosceles Triangle 22"/>
-          <p:cNvSpPr/>
-          <p:nvPr/>
-        </p:nvSpPr>
-        <p:spPr>
-          <a:xfrm rot="5400000">
-            <a:off x="6010276" y="4005263"/>
-            <a:ext cx="85725" cy="85725"/>
-          </a:xfrm>
-          <a:prstGeom prst="triangle">
-            <a:avLst/>
-          </a:prstGeom>
-          <a:solidFill>
-            <a:srgbClr val="475569"/>
-          </a:solidFill>
-          <a:ln>
-            <a:noFill/>
-          </a:ln>
-          <a:effectLst/>
-        </p:spPr>
-        <p:style>
-          <a:lnRef idx="1">
-            <a:schemeClr val="accent1"/>
-          </a:lnRef>
-          <a:fillRef idx="3">
-            <a:schemeClr val="accent1"/>
-          </a:fillRef>
-          <a:effectRef idx="2">
-            <a:schemeClr val="accent1"/>
-          </a:effectRef>
-          <a:fontRef idx="minor">
-            <a:schemeClr val="lt1"/>
-          </a:fontRef>
-        </p:style>
-        <p:txBody>
-          <a:bodyPr rtlCol="0" anchor="ctr"/>
-          <a:lstStyle/>
-          <a:p>
-            <a:pPr algn="ctr"/>
-          </a:p>
-        </p:txBody>
-      </p:sp>
-      <p:sp>
-        <p:nvSpPr>
-          <p:cNvPr id="24" name="TextBox 23"/>
-          <p:cNvSpPr txBox="1"/>
-          <p:nvPr/>
-        </p:nvSpPr>
-        <p:spPr>
-          <a:xfrm>
-            <a:off x="5162550" y="3724275"/>
-            <a:ext cx="1714500" cy="228600"/>
-          </a:xfrm>
-          <a:prstGeom prst="rect">
-            <a:avLst/>
-          </a:prstGeom>
-          <a:noFill/>
-        </p:spPr>
-        <p:txBody>
-          <a:bodyPr wrap="square" anchor="ctr">
-            <a:spAutoFit/>
-          </a:bodyPr>
-          <a:lstStyle/>
-          <a:p>
-            <a:pPr algn="ctr">
-              <a:lnSpc>
-                <a:spcPct val="100000"/>
-              </a:lnSpc>
-            </a:pPr>
-            <a:r>
-              <a:rPr sz="900" b="0">
-                <a:solidFill>
-                  <a:srgbClr val="94A3B8"/>
-                </a:solidFill>
-                <a:latin typeface="PingFang SC"/>
-              </a:rPr>
-              <a:t>过期清理|容量上限+淘汰策略</a:t>
-            </a:r>
-          </a:p>
-        </p:txBody>
-      </p:sp>
-      <p:sp>
-        <p:nvSpPr>
-          <p:cNvPr id="25" name="TextBox 24"/>
+              <a:t>过期清理</a:t>
+            </a:r>
+          </a:p>
+        </p:txBody>
+      </p:sp>
+      <p:sp>
+        <p:nvSpPr>
+          <p:cNvPr id="27" name="TextBox 26"/>
           <p:cNvSpPr txBox="1"/>
           <p:nvPr/>
         </p:nvSpPr>
@@ -18723,7 +18791,7 @@
       </p:sp>
       <p:sp>
         <p:nvSpPr>
-          <p:cNvPr id="26" name="TextBox 25"/>
+          <p:cNvPr id="28" name="TextBox 27"/>
           <p:cNvSpPr txBox="1"/>
           <p:nvPr/>
         </p:nvSpPr>
@@ -19920,7 +19988,7 @@
                 </a:solidFill>
                 <a:latin typeface="PingFang SC"/>
               </a:rPr>
-              <a:t>禁止事项|生命周期=单任务</a:t>
+              <a:t>禁止事项</a:t>
             </a:r>
           </a:p>
         </p:txBody>
@@ -21903,7 +21971,7 @@
                 </a:solidFill>
                 <a:latin typeface="PingFang SC"/>
               </a:rPr>
-              <a:t>已确认的事实|显式记录,不靠模型记性</a:t>
+              <a:t>已确认的事实</a:t>
             </a:r>
           </a:p>
         </p:txBody>

--- a/03-课件PPT/讲次版/第4章-2-讲次 4-2 · Working Memory 与任务上.pptx
+++ b/03-课件PPT/讲次版/第4章-2-讲次 4-2 · Working Memory 与任务上.pptx
@@ -18283,8 +18283,8 @@
         </p:nvSpPr>
         <p:spPr>
           <a:xfrm>
-            <a:off x="5500687" y="2133600"/>
-            <a:ext cx="1123950" cy="285750"/>
+            <a:off x="5500687" y="2124075"/>
+            <a:ext cx="1123950" cy="304800"/>
           </a:xfrm>
           <a:prstGeom prst="roundRect">
             <a:avLst>
@@ -18331,8 +18331,8 @@
         </p:nvSpPr>
         <p:spPr>
           <a:xfrm>
-            <a:off x="5500687" y="2133600"/>
-            <a:ext cx="1123950" cy="285750"/>
+            <a:off x="5500687" y="2124075"/>
+            <a:ext cx="1123950" cy="304800"/>
           </a:xfrm>
           <a:prstGeom prst="rect">
             <a:avLst/>
@@ -18369,20 +18369,18 @@
           <p:nvPr/>
         </p:nvCxnSpPr>
         <p:spPr>
-          <a:xfrm flipV="1">
-            <a:off x="8572500" y="1562100"/>
-            <a:ext cx="0" cy="419100"/>
+          <a:xfrm>
+            <a:off x="4714875" y="3705225"/>
+            <a:ext cx="2695575" cy="0"/>
           </a:xfrm>
           <a:prstGeom prst="line">
             <a:avLst/>
           </a:prstGeom>
-          <a:ln w="12700">
+          <a:ln w="19050">
             <a:solidFill>
-              <a:srgbClr val="DDE5EE"/>
+              <a:srgbClr val="2563EB"/>
             </a:solidFill>
-            <a:prstDash val="dash"/>
           </a:ln>
-          <a:effectLst/>
         </p:spPr>
         <p:style>
           <a:lnRef idx="2">
@@ -18399,229 +18397,9 @@
           </a:fontRef>
         </p:style>
       </p:cxnSp>
-      <p:cxnSp>
-        <p:nvCxnSpPr>
-          <p:cNvPr id="18" name="Connector 17"/>
-          <p:cNvCxnSpPr/>
-          <p:nvPr/>
-        </p:nvCxnSpPr>
-        <p:spPr>
-          <a:xfrm>
-            <a:off x="8572500" y="1562100"/>
-            <a:ext cx="0" cy="0"/>
-          </a:xfrm>
-          <a:prstGeom prst="line">
-            <a:avLst/>
-          </a:prstGeom>
-          <a:ln w="12700">
-            <a:solidFill>
-              <a:srgbClr val="DDE5EE"/>
-            </a:solidFill>
-            <a:prstDash val="dash"/>
-          </a:ln>
-          <a:effectLst/>
-        </p:spPr>
-        <p:style>
-          <a:lnRef idx="2">
-            <a:schemeClr val="accent1"/>
-          </a:lnRef>
-          <a:fillRef idx="0">
-            <a:schemeClr val="accent1"/>
-          </a:fillRef>
-          <a:effectRef idx="1">
-            <a:schemeClr val="accent1"/>
-          </a:effectRef>
-          <a:fontRef idx="minor">
-            <a:schemeClr val="tx1"/>
-          </a:fontRef>
-        </p:style>
-      </p:cxnSp>
-      <p:cxnSp>
-        <p:nvCxnSpPr>
-          <p:cNvPr id="19" name="Connector 18"/>
-          <p:cNvCxnSpPr/>
-          <p:nvPr/>
-        </p:nvCxnSpPr>
-        <p:spPr>
-          <a:xfrm>
-            <a:off x="8572500" y="1562100"/>
-            <a:ext cx="0" cy="352425"/>
-          </a:xfrm>
-          <a:prstGeom prst="line">
-            <a:avLst/>
-          </a:prstGeom>
-          <a:ln w="12700">
-            <a:solidFill>
-              <a:srgbClr val="DDE5EE"/>
-            </a:solidFill>
-            <a:prstDash val="dash"/>
-          </a:ln>
-          <a:effectLst/>
-        </p:spPr>
-        <p:style>
-          <a:lnRef idx="2">
-            <a:schemeClr val="accent1"/>
-          </a:lnRef>
-          <a:fillRef idx="0">
-            <a:schemeClr val="accent1"/>
-          </a:fillRef>
-          <a:effectRef idx="1">
-            <a:schemeClr val="accent1"/>
-          </a:effectRef>
-          <a:fontRef idx="minor">
-            <a:schemeClr val="tx1"/>
-          </a:fontRef>
-        </p:style>
-      </p:cxnSp>
-      <p:cxnSp>
-        <p:nvCxnSpPr>
-          <p:cNvPr id="20" name="Connector 19"/>
-          <p:cNvCxnSpPr/>
-          <p:nvPr/>
-        </p:nvCxnSpPr>
-        <p:spPr>
-          <a:xfrm flipV="1">
-            <a:off x="8572500" y="1562100"/>
-            <a:ext cx="0" cy="419100"/>
-          </a:xfrm>
-          <a:prstGeom prst="line">
-            <a:avLst/>
-          </a:prstGeom>
-          <a:ln w="12700">
-            <a:solidFill>
-              <a:srgbClr val="DDE5EE"/>
-            </a:solidFill>
-            <a:prstDash val="dash"/>
-          </a:ln>
-          <a:effectLst/>
-        </p:spPr>
-        <p:style>
-          <a:lnRef idx="2">
-            <a:schemeClr val="accent1"/>
-          </a:lnRef>
-          <a:fillRef idx="0">
-            <a:schemeClr val="accent1"/>
-          </a:fillRef>
-          <a:effectRef idx="1">
-            <a:schemeClr val="accent1"/>
-          </a:effectRef>
-          <a:fontRef idx="minor">
-            <a:schemeClr val="tx1"/>
-          </a:fontRef>
-        </p:style>
-      </p:cxnSp>
-      <p:cxnSp>
-        <p:nvCxnSpPr>
-          <p:cNvPr id="21" name="Connector 20"/>
-          <p:cNvCxnSpPr/>
-          <p:nvPr/>
-        </p:nvCxnSpPr>
-        <p:spPr>
-          <a:xfrm flipH="1">
-            <a:off x="3619500" y="1562100"/>
-            <a:ext cx="4953000" cy="0"/>
-          </a:xfrm>
-          <a:prstGeom prst="line">
-            <a:avLst/>
-          </a:prstGeom>
-          <a:ln w="12700">
-            <a:solidFill>
-              <a:srgbClr val="DDE5EE"/>
-            </a:solidFill>
-            <a:prstDash val="dash"/>
-          </a:ln>
-          <a:effectLst/>
-        </p:spPr>
-        <p:style>
-          <a:lnRef idx="2">
-            <a:schemeClr val="accent1"/>
-          </a:lnRef>
-          <a:fillRef idx="0">
-            <a:schemeClr val="accent1"/>
-          </a:fillRef>
-          <a:effectRef idx="1">
-            <a:schemeClr val="accent1"/>
-          </a:effectRef>
-          <a:fontRef idx="minor">
-            <a:schemeClr val="tx1"/>
-          </a:fontRef>
-        </p:style>
-      </p:cxnSp>
-      <p:cxnSp>
-        <p:nvCxnSpPr>
-          <p:cNvPr id="22" name="Connector 21"/>
-          <p:cNvCxnSpPr/>
-          <p:nvPr/>
-        </p:nvCxnSpPr>
-        <p:spPr>
-          <a:xfrm>
-            <a:off x="3619500" y="1562100"/>
-            <a:ext cx="0" cy="1781175"/>
-          </a:xfrm>
-          <a:prstGeom prst="line">
-            <a:avLst/>
-          </a:prstGeom>
-          <a:ln w="12700">
-            <a:solidFill>
-              <a:srgbClr val="DDE5EE"/>
-            </a:solidFill>
-            <a:prstDash val="dash"/>
-          </a:ln>
-          <a:effectLst/>
-        </p:spPr>
-        <p:style>
-          <a:lnRef idx="2">
-            <a:schemeClr val="accent1"/>
-          </a:lnRef>
-          <a:fillRef idx="0">
-            <a:schemeClr val="accent1"/>
-          </a:fillRef>
-          <a:effectRef idx="1">
-            <a:schemeClr val="accent1"/>
-          </a:effectRef>
-          <a:fontRef idx="minor">
-            <a:schemeClr val="tx1"/>
-          </a:fontRef>
-        </p:style>
-      </p:cxnSp>
-      <p:cxnSp>
-        <p:nvCxnSpPr>
-          <p:cNvPr id="23" name="Connector 22"/>
-          <p:cNvCxnSpPr/>
-          <p:nvPr/>
-        </p:nvCxnSpPr>
-        <p:spPr>
-          <a:xfrm>
-            <a:off x="4714875" y="3705225"/>
-            <a:ext cx="2695575" cy="0"/>
-          </a:xfrm>
-          <a:prstGeom prst="line">
-            <a:avLst/>
-          </a:prstGeom>
-          <a:ln w="19050">
-            <a:solidFill>
-              <a:srgbClr val="2563EB"/>
-            </a:solidFill>
-          </a:ln>
-        </p:spPr>
-        <p:style>
-          <a:lnRef idx="2">
-            <a:schemeClr val="accent1"/>
-          </a:lnRef>
-          <a:fillRef idx="0">
-            <a:schemeClr val="accent1"/>
-          </a:fillRef>
-          <a:effectRef idx="1">
-            <a:schemeClr val="accent1"/>
-          </a:effectRef>
-          <a:fontRef idx="minor">
-            <a:schemeClr val="tx1"/>
-          </a:fontRef>
-        </p:style>
-      </p:cxnSp>
-      <p:sp>
-        <p:nvSpPr>
-          <p:cNvPr id="24" name="Isosceles Triangle 23"/>
+      <p:sp>
+        <p:nvSpPr>
+          <p:cNvPr id="18" name="Isosceles Triangle 17"/>
           <p:cNvSpPr/>
           <p:nvPr/>
         </p:nvSpPr>
@@ -18665,14 +18443,14 @@
       </p:sp>
       <p:sp>
         <p:nvSpPr>
-          <p:cNvPr id="25" name="Rounded Rectangle 24"/>
+          <p:cNvPr id="19" name="Rounded Rectangle 18"/>
           <p:cNvSpPr/>
           <p:nvPr/>
         </p:nvSpPr>
         <p:spPr>
           <a:xfrm>
-            <a:off x="5500687" y="3562350"/>
-            <a:ext cx="1123950" cy="285750"/>
+            <a:off x="5500687" y="3552825"/>
+            <a:ext cx="1123950" cy="304800"/>
           </a:xfrm>
           <a:prstGeom prst="roundRect">
             <a:avLst>
@@ -18713,14 +18491,14 @@
       </p:sp>
       <p:sp>
         <p:nvSpPr>
-          <p:cNvPr id="26" name="TextBox 25"/>
+          <p:cNvPr id="20" name="TextBox 19"/>
           <p:cNvSpPr txBox="1"/>
           <p:nvPr/>
         </p:nvSpPr>
         <p:spPr>
           <a:xfrm>
-            <a:off x="5500687" y="3562350"/>
-            <a:ext cx="1123950" cy="285750"/>
+            <a:off x="5500687" y="3552825"/>
+            <a:ext cx="1123950" cy="304800"/>
           </a:xfrm>
           <a:prstGeom prst="rect">
             <a:avLst/>
@@ -18752,7 +18530,92 @@
       </p:sp>
       <p:sp>
         <p:nvSpPr>
-          <p:cNvPr id="27" name="TextBox 26"/>
+          <p:cNvPr id="21" name="Rounded Rectangle 20"/>
+          <p:cNvSpPr/>
+          <p:nvPr/>
+        </p:nvSpPr>
+        <p:spPr>
+          <a:xfrm>
+            <a:off x="1143000" y="6229350"/>
+            <a:ext cx="9906000" cy="381000"/>
+          </a:xfrm>
+          <a:prstGeom prst="roundRect">
+            <a:avLst>
+              <a:gd name="adj" fmla="val 8000"/>
+            </a:avLst>
+          </a:prstGeom>
+          <a:solidFill>
+            <a:srgbClr val="F1F5F9"/>
+          </a:solidFill>
+          <a:ln>
+            <a:noFill/>
+          </a:ln>
+          <a:effectLst/>
+        </p:spPr>
+        <p:style>
+          <a:lnRef idx="1">
+            <a:schemeClr val="accent1"/>
+          </a:lnRef>
+          <a:fillRef idx="3">
+            <a:schemeClr val="accent1"/>
+          </a:fillRef>
+          <a:effectRef idx="2">
+            <a:schemeClr val="accent1"/>
+          </a:effectRef>
+          <a:fontRef idx="minor">
+            <a:schemeClr val="lt1"/>
+          </a:fontRef>
+        </p:style>
+        <p:txBody>
+          <a:bodyPr rtlCol="0" anchor="ctr"/>
+          <a:lstStyle/>
+          <a:p>
+            <a:pPr algn="ctr"/>
+          </a:p>
+        </p:txBody>
+      </p:sp>
+      <p:sp>
+        <p:nvSpPr>
+          <p:cNvPr id="22" name="TextBox 21"/>
+          <p:cNvSpPr txBox="1"/>
+          <p:nvPr/>
+        </p:nvSpPr>
+        <p:spPr>
+          <a:xfrm>
+            <a:off x="1295400" y="6229350"/>
+            <a:ext cx="9601200" cy="381000"/>
+          </a:xfrm>
+          <a:prstGeom prst="rect">
+            <a:avLst/>
+          </a:prstGeom>
+          <a:noFill/>
+        </p:spPr>
+        <p:txBody>
+          <a:bodyPr wrap="square" anchor="ctr">
+            <a:spAutoFit/>
+          </a:bodyPr>
+          <a:lstStyle/>
+          <a:p>
+            <a:pPr algn="l">
+              <a:lnSpc>
+                <a:spcPct val="100000"/>
+              </a:lnSpc>
+            </a:pPr>
+            <a:r>
+              <a:rPr sz="1100" b="0">
+                <a:solidFill>
+                  <a:srgbClr val="475569"/>
+                </a:solidFill>
+                <a:latin typeface="PingFang SC"/>
+              </a:rPr>
+              <a:t>非相邻转移:updated → updated  updated → archived</a:t>
+            </a:r>
+          </a:p>
+        </p:txBody>
+      </p:sp>
+      <p:sp>
+        <p:nvSpPr>
+          <p:cNvPr id="23" name="TextBox 22"/>
           <p:cNvSpPr txBox="1"/>
           <p:nvPr/>
         </p:nvSpPr>
@@ -18791,7 +18654,7 @@
       </p:sp>
       <p:sp>
         <p:nvSpPr>
-          <p:cNvPr id="28" name="TextBox 27"/>
+          <p:cNvPr id="24" name="TextBox 23"/>
           <p:cNvSpPr txBox="1"/>
           <p:nvPr/>
         </p:nvSpPr>
